--- a/CodeVerse.pptx
+++ b/CodeVerse.pptx
@@ -3056,7 +3056,25 @@
                 </a:solidFill>
                 <a:latin typeface="Liter" pitchFamily="34" charset="0"/>
               </a:rPr>
-              <a:t>A real-time collaborative text editor</a:t>
+              <a:t>A real-time </a:t>
+            </a:r>
+            <a:r>
+              <a:rPr lang="en-US" sz="2800" b="1">
+                <a:solidFill>
+                  <a:srgbClr val="A0AAB3"/>
+                </a:solidFill>
+                <a:latin typeface="Liter" pitchFamily="34" charset="0"/>
+              </a:rPr>
+              <a:t>collaborative code </a:t>
+            </a:r>
+            <a:r>
+              <a:rPr lang="en-US" sz="2800" b="1" dirty="0">
+                <a:solidFill>
+                  <a:srgbClr val="A0AAB3"/>
+                </a:solidFill>
+                <a:latin typeface="Liter" pitchFamily="34" charset="0"/>
+              </a:rPr>
+              <a:t>editor</a:t>
             </a:r>
             <a:endParaRPr lang="en-IN" sz="2800" b="1" dirty="0">
               <a:solidFill>
